--- a/0023_studi_kasus3_materi_2_achmad_chilmi.pptx
+++ b/0023_studi_kasus3_materi_2_achmad_chilmi.pptx
@@ -9,27 +9,28 @@
     <p:sldId id="257" r:id="rId4"/>
     <p:sldId id="266" r:id="rId5"/>
     <p:sldId id="267" r:id="rId6"/>
-    <p:sldId id="268" r:id="rId7"/>
-    <p:sldId id="258" r:id="rId8"/>
+    <p:sldId id="268" r:id="rId15"/>
+    <p:sldId id="269" r:id="rId16"/>
+    <p:sldId id="258" r:id="rId7"/>
   </p:sldIdLst>
   <p:sldSz cx="18288000" cy="10287000"/>
   <p:notesSz cx="6858000" cy="9144000"/>
   <p:embeddedFontLst>
     <p:embeddedFont>
       <p:font typeface="Inter Bold" panose="020B0802030000000004" charset="0"/>
+      <p:regular r:id="rId11"/>
+    </p:embeddedFont>
+    <p:embeddedFont>
+      <p:font typeface="Inter" panose="020B0502030000000004" charset="0"/>
       <p:regular r:id="rId12"/>
     </p:embeddedFont>
     <p:embeddedFont>
-      <p:font typeface="Inter" panose="020B0502030000000004" charset="0"/>
+      <p:font typeface="Inter Light" panose="02000503000000020004" charset="0"/>
       <p:regular r:id="rId13"/>
     </p:embeddedFont>
     <p:embeddedFont>
-      <p:font typeface="Inter Light" panose="02000503000000020004" charset="0"/>
+      <p:font typeface="Inter Semi-Bold" panose="02000503000000020004" charset="0"/>
       <p:regular r:id="rId14"/>
-    </p:embeddedFont>
-    <p:embeddedFont>
-      <p:font typeface="Inter Semi-Bold" panose="02000503000000020004" charset="0"/>
-      <p:regular r:id="rId15"/>
     </p:embeddedFont>
   </p:embeddedFontLst>
   <p:defaultTextStyle>
@@ -3400,12 +3401,6 @@
               </a:rPr>
               <a:t>MATERI 2</a:t>
             </a:r>
-            <a:endParaRPr sz="4400" b="1">
-              <a:solidFill>
-                <a:srgbClr val="403E3E"/>
-              </a:solidFill>
-              <a:latin typeface="Inter Bold"/>
-            </a:endParaRPr>
           </a:p>
         </p:txBody>
       </p:sp>
@@ -3439,12 +3434,6 @@
               </a:rPr>
               <a:t>STUDI KASUS NO 3</a:t>
             </a:r>
-            <a:endParaRPr sz="3600" b="1">
-              <a:solidFill>
-                <a:srgbClr val="403E3E"/>
-              </a:solidFill>
-              <a:latin typeface="Inter Bold"/>
-            </a:endParaRPr>
           </a:p>
         </p:txBody>
       </p:sp>
@@ -3479,12 +3468,6 @@
               </a:rPr>
               <a:t>ACHMAD CHILMI</a:t>
             </a:r>
-            <a:endParaRPr sz="3600" b="1" i="0">
-              <a:solidFill>
-                <a:srgbClr val="403E3E"/>
-              </a:solidFill>
-              <a:latin typeface="Inter Bold"/>
-            </a:endParaRPr>
           </a:p>
         </p:txBody>
       </p:sp>
@@ -3519,12 +3502,6 @@
               </a:rPr>
               <a:t>2313020023</a:t>
             </a:r>
-            <a:endParaRPr sz="3600" b="1" i="0">
-              <a:solidFill>
-                <a:srgbClr val="403E3E"/>
-              </a:solidFill>
-              <a:latin typeface="Inter Bold"/>
-            </a:endParaRPr>
           </a:p>
         </p:txBody>
       </p:sp>
@@ -3559,12 +3536,6 @@
               </a:rPr>
               <a:t>3-A</a:t>
             </a:r>
-            <a:endParaRPr sz="3600" b="1" i="0">
-              <a:solidFill>
-                <a:srgbClr val="403E3E"/>
-              </a:solidFill>
-              <a:latin typeface="Inter Bold"/>
-            </a:endParaRPr>
           </a:p>
         </p:txBody>
       </p:sp>
@@ -3599,12 +3570,6 @@
               </a:rPr>
               <a:t>PEMODELAN &amp; SIMULASI</a:t>
             </a:r>
-            <a:endParaRPr sz="3600" b="1" i="0">
-              <a:solidFill>
-                <a:srgbClr val="403E3E"/>
-              </a:solidFill>
-              <a:latin typeface="Inter Bold"/>
-            </a:endParaRPr>
           </a:p>
         </p:txBody>
       </p:sp>
@@ -3640,12 +3605,6 @@
               <a:t>SIMULASI VALUASI HARGA PROPERTI DAN ESTIMASI NILAI JUAL RUMAH
 MENGGUNAKAN ALGORITMA SVR</a:t>
             </a:r>
-            <a:endParaRPr sz="4800" b="1" i="0">
-              <a:solidFill>
-                <a:srgbClr val="403E3E"/>
-              </a:solidFill>
-              <a:latin typeface="Inter Bold"/>
-            </a:endParaRPr>
           </a:p>
         </p:txBody>
       </p:sp>
@@ -3869,7 +3828,7 @@
         <p:spPr>
           <a:xfrm>
             <a:off x="90525" y="1028700"/>
-            <a:ext cx="8769096" cy="1445260"/>
+            <a:ext cx="8769096" cy="1354226"/>
           </a:xfrm>
           <a:prstGeom prst="rect">
             <a:avLst/>
@@ -3889,31 +3848,8 @@
                 </a:solidFill>
                 <a:latin typeface="Inter"/>
               </a:rPr>
-              <a:t>2. Model Analyst</a:t>
-            </a:r>
-            <a:endParaRPr sz="4400" b="0" i="0">
-              <a:solidFill>
-                <a:srgbClr val="403E3E"/>
-              </a:solidFill>
-              <a:latin typeface="Inter"/>
-            </a:endParaRPr>
-          </a:p>
-          <a:p>
-            <a:r>
-              <a:rPr sz="4400" b="0" i="0">
-                <a:solidFill>
-                  <a:srgbClr val="403E3E"/>
-                </a:solidFill>
-                <a:latin typeface="Inter"/>
-              </a:rPr>
-              <a:t> &amp; Strategist</a:t>
-            </a:r>
-            <a:endParaRPr sz="4400" b="0" i="0">
-              <a:solidFill>
-                <a:srgbClr val="403E3E"/>
-              </a:solidFill>
-              <a:latin typeface="Inter"/>
-            </a:endParaRPr>
+              <a:t>2. Model Analyst &amp; Strategist</a:t>
+            </a:r>
           </a:p>
         </p:txBody>
       </p:sp>
@@ -3946,14 +3882,8 @@
                 </a:solidFill>
                 <a:latin typeface="Inter"/>
               </a:rPr>
-              <a:t>Filosofi Strategi Pemodelan</a:t>
-            </a:r>
-            <a:endParaRPr sz="4400" b="0" i="0">
-              <a:solidFill>
-                <a:srgbClr val="403E3E"/>
-              </a:solidFill>
-              <a:latin typeface="Inter"/>
-            </a:endParaRPr>
+              <a:t>Arsitektur Model SVR</a:t>
+            </a:r>
           </a:p>
         </p:txBody>
       </p:sp>
@@ -3983,7 +3913,7 @@
               <a:spcAft>
                 <a:spcPts val="1200"/>
               </a:spcAft>
-              <a:defRPr sz="2600">
+              <a:defRPr sz="2800">
                 <a:solidFill>
                   <a:srgbClr val="403E3E"/>
                 </a:solidFill>
@@ -3991,7 +3921,7 @@
               </a:defRPr>
             </a:pPr>
             <a:r>
-              <a:t>A. Mengapa SVR (Support Vector Regression)?</a:t>
+              <a:t>Mengapa SVR? Karena korelasi antara karakteristik fisik, letak geografis, dan harga rumah sering bersifat non-linear dan kompleks.</a:t>
             </a:r>
           </a:p>
           <a:p>
@@ -3999,7 +3929,7 @@
               <a:spcAft>
                 <a:spcPts val="1200"/>
               </a:spcAft>
-              <a:defRPr sz="2600">
+              <a:defRPr sz="2800">
                 <a:solidFill>
                   <a:srgbClr val="403E3E"/>
                 </a:solidFill>
@@ -4007,7 +3937,7 @@
               </a:defRPr>
             </a:pPr>
             <a:r>
-              <a:t>Logika Analis: "Hubungan antara karakteristik fisik rumah, lokasi geografis, dan harga sering kali bersifat non-linear kompleks. Algoritma SVR dengan kernel RBF (Radial Basis Function) mampu memetakan fitur ke dimensi tinggi untuk mencari margin kesalahan terkecil secara optimal."</a:t>
+              <a:t>Kernel RBF: Menggunakan kernel Radial Basis Function (RBF) untuk memetakan fitur ke ruang dimensi tinggi agar batas keputusan non-linear dapat ditemukan secara optimal.</a:t>
             </a:r>
           </a:p>
           <a:p>
@@ -4015,7 +3945,7 @@
               <a:spcAft>
                 <a:spcPts val="1200"/>
               </a:spcAft>
-              <a:defRPr sz="2600">
+              <a:defRPr sz="2800">
                 <a:solidFill>
                   <a:srgbClr val="403E3E"/>
                 </a:solidFill>
@@ -4023,7 +3953,7 @@
               </a:defRPr>
             </a:pPr>
             <a:r>
-              <a:t>Strategi Tuning: Mengatur parameter penalti C=10.0 untuk menyeimbangkan margin, dan epsilon=0.1 untuk mendefinisikan batas toleransi kesalahan.</a:t>
+              <a:t>Hyperparameter Tuning: Parameter penalti C disetel ke 10.0 untuk menyeimbangkan penalti kesalahan, dan epsilon tube width disetel ke 0.1 untuk mengabaikan deviasi kecil.</a:t>
             </a:r>
           </a:p>
         </p:txBody>
@@ -4180,12 +4110,6 @@
               </a:rPr>
               <a:t>PAGE 3</a:t>
             </a:r>
-            <a:endParaRPr sz="1800">
-              <a:solidFill>
-                <a:srgbClr val="403E3E"/>
-              </a:solidFill>
-              <a:latin typeface="Inter"/>
-            </a:endParaRPr>
           </a:p>
         </p:txBody>
       </p:sp>
@@ -4287,7 +4211,7 @@
         <p:spPr>
           <a:xfrm>
             <a:off x="90525" y="1028700"/>
-            <a:ext cx="8769096" cy="1445260"/>
+            <a:ext cx="8769096" cy="1354226"/>
           </a:xfrm>
           <a:prstGeom prst="rect">
             <a:avLst/>
@@ -4307,31 +4231,8 @@
                 </a:solidFill>
                 <a:latin typeface="Inter"/>
               </a:rPr>
-              <a:t>2. Model Analyst </a:t>
-            </a:r>
-            <a:endParaRPr sz="4400" b="0" i="0">
-              <a:solidFill>
-                <a:srgbClr val="403E3E"/>
-              </a:solidFill>
-              <a:latin typeface="Inter"/>
-            </a:endParaRPr>
-          </a:p>
-          <a:p>
-            <a:r>
-              <a:rPr sz="4400" b="0" i="0">
-                <a:solidFill>
-                  <a:srgbClr val="403E3E"/>
-                </a:solidFill>
-                <a:latin typeface="Inter"/>
-              </a:rPr>
-              <a:t>&amp; Strategist</a:t>
-            </a:r>
-            <a:endParaRPr sz="4400" b="0" i="0">
-              <a:solidFill>
-                <a:srgbClr val="403E3E"/>
-              </a:solidFill>
-              <a:latin typeface="Inter"/>
-            </a:endParaRPr>
+              <a:t>2. Model Analyst &amp; Strategist</a:t>
+            </a:r>
           </a:p>
         </p:txBody>
       </p:sp>
@@ -4364,14 +4265,8 @@
                 </a:solidFill>
                 <a:latin typeface="Inter"/>
               </a:rPr>
-              <a:t>Deep Dive: Model Assessment</a:t>
-            </a:r>
-            <a:endParaRPr sz="4400" b="0" i="0">
-              <a:solidFill>
-                <a:srgbClr val="403E3E"/>
-              </a:solidFill>
-              <a:latin typeface="Inter"/>
-            </a:endParaRPr>
+              <a:t>Evaluasi Akurasi Galat SVR</a:t>
+            </a:r>
           </a:p>
         </p:txBody>
       </p:sp>
@@ -4409,7 +4304,7 @@
               </a:defRPr>
             </a:pPr>
             <a:r>
-              <a:t>A. Uji Akurasi Galat Regresi</a:t>
+              <a:t>Pengujian Kinerja: Model diuji pada 20% test set yang tidak terlihat selama pelatihan.</a:t>
             </a:r>
           </a:p>
           <a:p>
@@ -4425,7 +4320,55 @@
               </a:defRPr>
             </a:pPr>
             <a:r>
-              <a:t>Metrik Evaluasi: Menggunakan MAE (Mean Absolute Error), RMSE (Root Mean Squared Error), dan R-squared (R2 Score).</a:t>
+              <a:t>Hasil Metrik Evaluasi:</a:t>
+            </a:r>
+          </a:p>
+          <a:p>
+            <a:pPr lvl="1">
+              <a:spcAft>
+                <a:spcPts val="1200"/>
+              </a:spcAft>
+              <a:defRPr sz="2000">
+                <a:solidFill>
+                  <a:srgbClr val="403E3E"/>
+                </a:solidFill>
+                <a:latin typeface="Inter"/>
+              </a:defRPr>
+            </a:pPr>
+            <a:r>
+              <a:t>- R-squared (R2 Score): 0.65 (Model mampu menjelaskan 65% variabilitas harga rumah).</a:t>
+            </a:r>
+          </a:p>
+          <a:p>
+            <a:pPr lvl="1">
+              <a:spcAft>
+                <a:spcPts val="1200"/>
+              </a:spcAft>
+              <a:defRPr sz="2000">
+                <a:solidFill>
+                  <a:srgbClr val="403E3E"/>
+                </a:solidFill>
+                <a:latin typeface="Inter"/>
+              </a:defRPr>
+            </a:pPr>
+            <a:r>
+              <a:t>- MAE (Mean Absolute Error): Sekitar $110.000 (Rata-rata selisih mutlak prediksi harga).</a:t>
+            </a:r>
+          </a:p>
+          <a:p>
+            <a:pPr lvl="1">
+              <a:spcAft>
+                <a:spcPts val="1200"/>
+              </a:spcAft>
+              <a:defRPr sz="2000">
+                <a:solidFill>
+                  <a:srgbClr val="403E3E"/>
+                </a:solidFill>
+                <a:latin typeface="Inter"/>
+              </a:defRPr>
+            </a:pPr>
+            <a:r>
+              <a:t>- RMSE (Root Mean Squared Error): Sekitar $210.000 (Sangat sensitif terhadap penyimpangan harga yang besar).</a:t>
             </a:r>
           </a:p>
           <a:p>
@@ -4441,71 +4384,7 @@
               </a:defRPr>
             </a:pPr>
             <a:r>
-              <a:t>Hasil Performa SVR:</a:t>
-            </a:r>
-          </a:p>
-          <a:p>
-            <a:pPr lvl="1">
-              <a:spcAft>
-                <a:spcPts val="1200"/>
-              </a:spcAft>
-              <a:defRPr sz="2000">
-                <a:solidFill>
-                  <a:srgbClr val="403E3E"/>
-                </a:solidFill>
-                <a:latin typeface="Inter"/>
-              </a:defRPr>
-            </a:pPr>
-            <a:r>
-              <a:t>- R2 Score (Data Uji): 0.65 (Model berhasil menjelaskan 65% variabilitas harga rumah).</a:t>
-            </a:r>
-          </a:p>
-          <a:p>
-            <a:pPr lvl="1">
-              <a:spcAft>
-                <a:spcPts val="1200"/>
-              </a:spcAft>
-              <a:defRPr sz="2000">
-                <a:solidFill>
-                  <a:srgbClr val="403E3E"/>
-                </a:solidFill>
-                <a:latin typeface="Inter"/>
-              </a:defRPr>
-            </a:pPr>
-            <a:r>
-              <a:t>- MAE: Sekitar $110.000 (Galat rata-rata taksiran harga).</a:t>
-            </a:r>
-          </a:p>
-          <a:p>
-            <a:pPr lvl="1">
-              <a:spcAft>
-                <a:spcPts val="1200"/>
-              </a:spcAft>
-              <a:defRPr sz="2000">
-                <a:solidFill>
-                  <a:srgbClr val="403E3E"/>
-                </a:solidFill>
-                <a:latin typeface="Inter"/>
-              </a:defRPr>
-            </a:pPr>
-            <a:r>
-              <a:t>- RMSE: Sekitar $210.000 (Sensitif terhadap galat besar).</a:t>
-            </a:r>
-          </a:p>
-          <a:p>
-            <a:pPr>
-              <a:spcAft>
-                <a:spcPts val="1200"/>
-              </a:spcAft>
-              <a:defRPr sz="2400">
-                <a:solidFill>
-                  <a:srgbClr val="403E3E"/>
-                </a:solidFill>
-                <a:latin typeface="Inter"/>
-              </a:defRPr>
-            </a:pPr>
-            <a:r>
-              <a:t>Kesimpulan: Galat relatif wajar mengingat sebaran harga properti yang sangat dinamis (dari ratusan ribu hingga jutaan USD).</a:t>
+              <a:t>Kesimpulan: Tingkat galat relatif wajar mengingat variasi harga rumah di pasar berkisar dari ratusan ribu hingga jutaan USD.</a:t>
             </a:r>
           </a:p>
         </p:txBody>
@@ -4662,12 +4541,6 @@
               </a:rPr>
               <a:t>PAGE 4</a:t>
             </a:r>
-            <a:endParaRPr sz="1800">
-              <a:solidFill>
-                <a:srgbClr val="403E3E"/>
-              </a:solidFill>
-              <a:latin typeface="Inter"/>
-            </a:endParaRPr>
           </a:p>
         </p:txBody>
       </p:sp>
@@ -4769,7 +4642,7 @@
         <p:spPr>
           <a:xfrm>
             <a:off x="90525" y="1028700"/>
-            <a:ext cx="8769096" cy="1445260"/>
+            <a:ext cx="8769096" cy="1354226"/>
           </a:xfrm>
           <a:prstGeom prst="rect">
             <a:avLst/>
@@ -4789,31 +4662,8 @@
                 </a:solidFill>
                 <a:latin typeface="Inter"/>
               </a:rPr>
-              <a:t>2. Model Analyst</a:t>
-            </a:r>
-            <a:endParaRPr sz="4400" b="0" i="0">
-              <a:solidFill>
-                <a:srgbClr val="403E3E"/>
-              </a:solidFill>
-              <a:latin typeface="Inter"/>
-            </a:endParaRPr>
-          </a:p>
-          <a:p>
-            <a:r>
-              <a:rPr sz="4400" b="0" i="0">
-                <a:solidFill>
-                  <a:srgbClr val="403E3E"/>
-                </a:solidFill>
-                <a:latin typeface="Inter"/>
-              </a:rPr>
-              <a:t> &amp; Strategist</a:t>
-            </a:r>
-            <a:endParaRPr sz="4400" b="0" i="0">
-              <a:solidFill>
-                <a:srgbClr val="403E3E"/>
-              </a:solidFill>
-              <a:latin typeface="Inter"/>
-            </a:endParaRPr>
+              <a:t>2. Model Analyst &amp; Strategist</a:t>
+            </a:r>
           </a:p>
         </p:txBody>
       </p:sp>
@@ -4846,14 +4696,8 @@
                 </a:solidFill>
                 <a:latin typeface="Inter"/>
               </a:rPr>
-              <a:t>Explainable AI (XAI) dengan SHAP</a:t>
-            </a:r>
-            <a:endParaRPr sz="4400" b="0" i="0">
-              <a:solidFill>
-                <a:srgbClr val="403E3E"/>
-              </a:solidFill>
-              <a:latin typeface="Inter"/>
-            </a:endParaRPr>
+              <a:t>Explainable AI (XAI) via SHAP</a:t>
+            </a:r>
           </a:p>
         </p:txBody>
       </p:sp>
@@ -4883,7 +4727,7 @@
               <a:spcAft>
                 <a:spcPts val="1200"/>
               </a:spcAft>
-              <a:defRPr sz="2400">
+              <a:defRPr sz="2600">
                 <a:solidFill>
                   <a:srgbClr val="403E3E"/>
                 </a:solidFill>
@@ -4891,7 +4735,7 @@
               </a:defRPr>
             </a:pPr>
             <a:r>
-              <a:t>A. Paradigma Transparansi Keputusan SVR</a:t>
+              <a:t>Membuka Black-Box SVR: Menggunakan SHAP untuk memvisualisasikan bagaimana model menetapkan nilai properti secara aditif.</a:t>
             </a:r>
           </a:p>
           <a:p>
@@ -4899,7 +4743,7 @@
               <a:spcAft>
                 <a:spcPts val="1200"/>
               </a:spcAft>
-              <a:defRPr sz="2400">
+              <a:defRPr sz="2600">
                 <a:solidFill>
                   <a:srgbClr val="403E3E"/>
                 </a:solidFill>
@@ -4907,23 +4751,7 @@
               </a:defRPr>
             </a:pPr>
             <a:r>
-              <a:t>Interpretasi SHAP: Menjelaskan kontribusi setiap fitur terhadap harga prediksi akhir properti.</a:t>
-            </a:r>
-          </a:p>
-          <a:p>
-            <a:pPr>
-              <a:spcAft>
-                <a:spcPts val="1200"/>
-              </a:spcAft>
-              <a:defRPr sz="2400">
-                <a:solidFill>
-                  <a:srgbClr val="403E3E"/>
-                </a:solidFill>
-                <a:latin typeface="Inter"/>
-              </a:defRPr>
-            </a:pPr>
-            <a:r>
-              <a:t>Fitur Pendorong (Push Features):</a:t>
+              <a:t>Analisis Fitur Dominan:</a:t>
             </a:r>
           </a:p>
           <a:p>
@@ -4931,7 +4759,7 @@
               <a:spcAft>
                 <a:spcPts val="1200"/>
               </a:spcAft>
-              <a:defRPr sz="2000">
+              <a:defRPr sz="2200">
                 <a:solidFill>
                   <a:srgbClr val="403E3E"/>
                 </a:solidFill>
@@ -4939,7 +4767,7 @@
               </a:defRPr>
             </a:pPr>
             <a:r>
-              <a:t>- sqft_living dan grade tinggi sangat dominan mendorong taksiran harga properti ke atas.</a:t>
+              <a:t>- sqft_living dan grade tinggi bertindak sebagai pendorong harga ke atas (Push Features).</a:t>
             </a:r>
           </a:p>
           <a:p>
@@ -4947,7 +4775,7 @@
               <a:spcAft>
                 <a:spcPts val="1200"/>
               </a:spcAft>
-              <a:defRPr sz="2000">
+              <a:defRPr sz="2200">
                 <a:solidFill>
                   <a:srgbClr val="403E3E"/>
                 </a:solidFill>
@@ -4955,23 +4783,7 @@
               </a:defRPr>
             </a:pPr>
             <a:r>
-              <a:t>- lat (koordinat utara) menarik harga ke atas (lokasi premium dekat pusat kota).</a:t>
-            </a:r>
-          </a:p>
-          <a:p>
-            <a:pPr>
-              <a:spcAft>
-                <a:spcPts val="1200"/>
-              </a:spcAft>
-              <a:defRPr sz="2400">
-                <a:solidFill>
-                  <a:srgbClr val="403E3E"/>
-                </a:solidFill>
-                <a:latin typeface="Inter"/>
-              </a:defRPr>
-            </a:pPr>
-            <a:r>
-              <a:t>Fitur Penarik (Pull Features):</a:t>
+              <a:t>- Koordinat lintang (lat) bagian utara menarik harga properti ke atas, mencerminkan nilai tanah premium.</a:t>
             </a:r>
           </a:p>
           <a:p>
@@ -4979,7 +4791,7 @@
               <a:spcAft>
                 <a:spcPts val="1200"/>
               </a:spcAft>
-              <a:defRPr sz="2000">
+              <a:defRPr sz="2200">
                 <a:solidFill>
                   <a:srgbClr val="403E3E"/>
                 </a:solidFill>
@@ -4987,7 +4799,7 @@
               </a:defRPr>
             </a:pPr>
             <a:r>
-              <a:t>- House_Age yang tinggi (usia tua) menarik harga properti ke bawah.</a:t>
+              <a:t>- Usia bangunan (House_Age) yang semakin tua bertindak sebagai penarik harga properti ke bawah (Pull Features).</a:t>
             </a:r>
           </a:p>
         </p:txBody>
@@ -5001,7 +4813,7 @@
 </file>
 
 <file path=ppt/slides/slide5.xml><?xml version="1.0" encoding="utf-8"?>
-<p:sld xmlns:a="http://schemas.openxmlformats.org/drawingml/2006/main" xmlns:r="http://schemas.openxmlformats.org/officeDocument/2006/relationships" xmlns:p="http://schemas.openxmlformats.org/presentationml/2006/main">
+<p:sld xmlns:a="http://schemas.openxmlformats.org/drawingml/2006/main" xmlns:p="http://schemas.openxmlformats.org/presentationml/2006/main" xmlns:r="http://schemas.openxmlformats.org/officeDocument/2006/relationships">
   <p:cSld>
     <p:spTree>
       <p:nvGrpSpPr>
@@ -5129,12 +4941,6 @@
               </a:rPr>
               <a:t>PAGE 5</a:t>
             </a:r>
-            <a:endParaRPr sz="1800">
-              <a:solidFill>
-                <a:srgbClr val="403E3E"/>
-              </a:solidFill>
-              <a:latin typeface="Inter"/>
-            </a:endParaRPr>
           </a:p>
         </p:txBody>
       </p:sp>
@@ -5236,7 +5042,7 @@
         <p:spPr>
           <a:xfrm>
             <a:off x="90525" y="1028700"/>
-            <a:ext cx="8769096" cy="1445260"/>
+            <a:ext cx="8769096" cy="1354226"/>
           </a:xfrm>
           <a:prstGeom prst="rect">
             <a:avLst/>
@@ -5256,31 +5062,8 @@
                 </a:solidFill>
                 <a:latin typeface="Inter"/>
               </a:rPr>
-              <a:t>2. Model Analyst </a:t>
-            </a:r>
-            <a:endParaRPr sz="4400" b="0" i="0">
-              <a:solidFill>
-                <a:srgbClr val="403E3E"/>
-              </a:solidFill>
-              <a:latin typeface="Inter"/>
-            </a:endParaRPr>
-          </a:p>
-          <a:p>
-            <a:r>
-              <a:rPr sz="4400" b="0" i="0">
-                <a:solidFill>
-                  <a:srgbClr val="403E3E"/>
-                </a:solidFill>
-                <a:latin typeface="Inter"/>
-              </a:rPr>
-              <a:t>&amp; Strategist</a:t>
-            </a:r>
-            <a:endParaRPr sz="4400" b="0" i="0">
-              <a:solidFill>
-                <a:srgbClr val="403E3E"/>
-              </a:solidFill>
-              <a:latin typeface="Inter"/>
-            </a:endParaRPr>
+              <a:t>2. Model Analyst &amp; Strategist</a:t>
+            </a:r>
           </a:p>
         </p:txBody>
       </p:sp>
@@ -5313,14 +5096,8 @@
                 </a:solidFill>
                 <a:latin typeface="Inter"/>
               </a:rPr>
-              <a:t>What-If Analysis</a:t>
-            </a:r>
-            <a:endParaRPr sz="4400" b="0" i="0">
-              <a:solidFill>
-                <a:srgbClr val="403E3E"/>
-              </a:solidFill>
-              <a:latin typeface="Inter"/>
-            </a:endParaRPr>
+              <a:t>What-If Simulator Valuasi Rumah</a:t>
+            </a:r>
           </a:p>
         </p:txBody>
       </p:sp>
@@ -5358,7 +5135,7 @@
               </a:defRPr>
             </a:pPr>
             <a:r>
-              <a:t>A. Simulasi Valuasi Dinamis Rumah</a:t>
+              <a:t>Implementasi Fungsi: Membangun simulator valuation_simulator(house_index, quality_upgrade, renovate) untuk memperkirakan harga secara real-time.</a:t>
             </a:r>
           </a:p>
           <a:p>
@@ -5374,7 +5151,7 @@
               </a:defRPr>
             </a:pPr>
             <a:r>
-              <a:t>Skenario What-If: Membangun fungsi simulator valuation_simulator(house_index, quality_upgrade, renovate) untuk memprediksi perubahan harga properti pasca-renovasi.</a:t>
+              <a:t>Studi Kasus What-If: Mensimulasikan dampak renovasi fisik (menaikkan grade dari 7 ke 9 dan menyetel Is_Renovated ke 1).</a:t>
             </a:r>
           </a:p>
           <a:p>
@@ -5390,7 +5167,7 @@
               </a:defRPr>
             </a:pPr>
             <a:r>
-              <a:t>Business Impact: "Dengan simulator ini, calon penjual atau investor properti dapat mengestimasi kenaikan harga taksir sebelum melakukan renovasi fisik, mengoptimalkan Return on Investment (ROI)."</a:t>
+              <a:t>Nilai Bisnis: Membantu penjual atau investor memperkirakan kenaikan taksiran harga sebelum mengeluarkan modal renovasi nyata untuk mengukur kelayakan ROI proyek.</a:t>
             </a:r>
           </a:p>
         </p:txBody>
@@ -5404,30 +5181,15 @@
 </file>
 
 <file path=ppt/slides/slide6.xml><?xml version="1.0" encoding="utf-8"?>
-<p:sld xmlns:a="http://schemas.openxmlformats.org/drawingml/2006/main" xmlns:r="http://schemas.openxmlformats.org/officeDocument/2006/relationships" xmlns:p="http://schemas.openxmlformats.org/presentationml/2006/main">
+<p:sld xmlns:a="http://schemas.openxmlformats.org/drawingml/2006/main" xmlns:p="http://schemas.openxmlformats.org/presentationml/2006/main" xmlns:r="http://schemas.openxmlformats.org/officeDocument/2006/relationships">
   <p:cSld>
-    <p:bg>
-      <p:bgPr>
-        <a:solidFill>
-          <a:srgbClr val="F6F5F3"/>
-        </a:solidFill>
-        <a:effectLst/>
-      </p:bgPr>
-    </p:bg>
     <p:spTree>
       <p:nvGrpSpPr>
         <p:cNvPr id="1" name=""/>
         <p:cNvGrpSpPr/>
         <p:nvPr/>
       </p:nvGrpSpPr>
-      <p:grpSpPr>
-        <a:xfrm>
-          <a:off x="0" y="0"/>
-          <a:ext cx="0" cy="0"/>
-          <a:chOff x="0" y="0"/>
-          <a:chExt cx="0" cy="0"/>
-        </a:xfrm>
-      </p:grpSpPr>
+      <p:grpSpPr/>
       <p:grpSp>
         <p:nvGrpSpPr>
           <p:cNvPr id="2" name="Group 2"/>
@@ -5519,14 +5281,136 @@
       </p:grpSp>
       <p:sp>
         <p:nvSpPr>
-          <p:cNvPr id="5" name="TextBox 4"/>
+          <p:cNvPr id="9" name="TextBox 9"/>
           <p:cNvSpPr txBox="1"/>
           <p:nvPr/>
         </p:nvSpPr>
         <p:spPr>
           <a:xfrm>
-            <a:off x="7696504" y="3771900"/>
-            <a:ext cx="7552944" cy="926287"/>
+            <a:off x="15506330" y="8951595"/>
+            <a:ext cx="152400" cy="190500"/>
+          </a:xfrm>
+          <a:prstGeom prst="rect">
+            <a:avLst/>
+          </a:prstGeom>
+        </p:spPr>
+        <p:txBody>
+          <a:bodyPr wrap="none" lIns="0" tIns="0" rIns="0" bIns="0" rtlCol="0" anchor="t">
+            <a:spAutoFit/>
+          </a:bodyPr>
+          <a:lstStyle/>
+          <a:p>
+            <a:r>
+              <a:rPr sz="1800">
+                <a:solidFill>
+                  <a:srgbClr val="403E3E"/>
+                </a:solidFill>
+                <a:latin typeface="Inter"/>
+              </a:rPr>
+              <a:t>PAGE 6</a:t>
+            </a:r>
+          </a:p>
+        </p:txBody>
+      </p:sp>
+      <p:grpSp>
+        <p:nvGrpSpPr>
+          <p:cNvPr id="15" name="Group 15"/>
+          <p:cNvGrpSpPr/>
+          <p:nvPr/>
+        </p:nvGrpSpPr>
+        <p:grpSpPr>
+          <a:xfrm rot="5400000">
+            <a:off x="-3195310" y="2727751"/>
+            <a:ext cx="10730064" cy="4831498"/>
+            <a:chOff x="0" y="0"/>
+            <a:chExt cx="3845413" cy="1731500"/>
+          </a:xfrm>
+        </p:grpSpPr>
+        <p:sp>
+          <p:nvSpPr>
+            <p:cNvPr id="16" name="Freeform 16"/>
+            <p:cNvSpPr/>
+            <p:nvPr/>
+          </p:nvSpPr>
+          <p:spPr>
+            <a:xfrm>
+              <a:off x="0" y="0"/>
+              <a:ext cx="3845413" cy="1731500"/>
+            </a:xfrm>
+            <a:custGeom>
+              <a:avLst/>
+              <a:gdLst/>
+              <a:ahLst/>
+              <a:cxnLst/>
+              <a:rect l="l" t="t" r="r" b="b"/>
+              <a:pathLst>
+                <a:path w="3845413" h="1731500">
+                  <a:moveTo>
+                    <a:pt x="0" y="0"/>
+                  </a:moveTo>
+                  <a:lnTo>
+                    <a:pt x="3845413" y="0"/>
+                  </a:lnTo>
+                  <a:lnTo>
+                    <a:pt x="3845413" y="1731500"/>
+                  </a:lnTo>
+                  <a:lnTo>
+                    <a:pt x="0" y="1731500"/>
+                  </a:lnTo>
+                  <a:close/>
+                </a:path>
+              </a:pathLst>
+            </a:custGeom>
+            <a:solidFill>
+              <a:srgbClr val="F6F5F3"/>
+            </a:solidFill>
+            <a:ln w="9525" cap="sq">
+              <a:solidFill>
+                <a:srgbClr val="403E3E"/>
+              </a:solidFill>
+              <a:prstDash val="solid"/>
+              <a:miter/>
+            </a:ln>
+          </p:spPr>
+        </p:sp>
+        <p:sp>
+          <p:nvSpPr>
+            <p:cNvPr id="17" name="TextBox 17"/>
+            <p:cNvSpPr txBox="1"/>
+            <p:nvPr/>
+          </p:nvSpPr>
+          <p:spPr>
+            <a:xfrm>
+              <a:off x="0" y="-47625"/>
+              <a:ext cx="3845413" cy="1779125"/>
+            </a:xfrm>
+            <a:prstGeom prst="rect">
+              <a:avLst/>
+            </a:prstGeom>
+          </p:spPr>
+          <p:txBody>
+            <a:bodyPr lIns="50800" tIns="50800" rIns="50800" bIns="50800" rtlCol="0" anchor="ctr"/>
+            <a:lstStyle/>
+            <a:p>
+              <a:pPr algn="ctr">
+                <a:lnSpc>
+                  <a:spcPts val="1960"/>
+                </a:lnSpc>
+              </a:pPr>
+            </a:p>
+          </p:txBody>
+        </p:sp>
+      </p:grpSp>
+      <p:sp>
+        <p:nvSpPr>
+          <p:cNvPr id="18" name="TextBox 17"/>
+          <p:cNvSpPr txBox="1"/>
+          <p:nvPr/>
+        </p:nvSpPr>
+        <p:spPr>
+          <a:xfrm>
+            <a:off x="90525" y="1028700"/>
+            <a:ext cx="8769096" cy="1354226"/>
           </a:xfrm>
           <a:prstGeom prst="rect">
             <a:avLst/>
@@ -5540,6 +5424,283 @@
           <a:lstStyle/>
           <a:p>
             <a:r>
+              <a:rPr sz="4400" b="0" i="0">
+                <a:solidFill>
+                  <a:srgbClr val="403E3E"/>
+                </a:solidFill>
+                <a:latin typeface="Inter"/>
+              </a:rPr>
+              <a:t>2. Model Analyst &amp; Strategist</a:t>
+            </a:r>
+          </a:p>
+        </p:txBody>
+      </p:sp>
+      <p:sp>
+        <p:nvSpPr>
+          <p:cNvPr id="19" name="TextBox 18"/>
+          <p:cNvSpPr txBox="1"/>
+          <p:nvPr/>
+        </p:nvSpPr>
+        <p:spPr>
+          <a:xfrm>
+            <a:off x="457200" y="3161995"/>
+            <a:ext cx="3994099" cy="2708452"/>
+          </a:xfrm>
+          <a:prstGeom prst="rect">
+            <a:avLst/>
+          </a:prstGeom>
+          <a:noFill/>
+        </p:spPr>
+        <p:txBody>
+          <a:bodyPr wrap="square">
+            <a:spAutoFit/>
+          </a:bodyPr>
+          <a:lstStyle/>
+          <a:p>
+            <a:r>
+              <a:rPr sz="4400" b="0" i="0">
+                <a:solidFill>
+                  <a:srgbClr val="403E3E"/>
+                </a:solidFill>
+                <a:latin typeface="Inter"/>
+              </a:rPr>
+              <a:t>Rekomendasi Strategis Broker Properti</a:t>
+            </a:r>
+          </a:p>
+        </p:txBody>
+      </p:sp>
+      <p:sp>
+        <p:nvSpPr>
+          <p:cNvPr id="20" name="TextBox 19"/>
+          <p:cNvSpPr txBox="1"/>
+          <p:nvPr/>
+        </p:nvSpPr>
+        <p:spPr>
+          <a:xfrm>
+            <a:off x="5410504" y="1028700"/>
+            <a:ext cx="12401092" cy="7755940"/>
+          </a:xfrm>
+          <a:prstGeom prst="rect">
+            <a:avLst/>
+          </a:prstGeom>
+          <a:noFill/>
+        </p:spPr>
+        <p:txBody>
+          <a:bodyPr wrap="square">
+            <a:spAutoFit/>
+          </a:bodyPr>
+          <a:lstStyle/>
+          <a:p>
+            <a:pPr>
+              <a:spcAft>
+                <a:spcPts val="1200"/>
+              </a:spcAft>
+              <a:defRPr sz="2800">
+                <a:solidFill>
+                  <a:srgbClr val="403E3E"/>
+                </a:solidFill>
+                <a:latin typeface="Inter"/>
+              </a:defRPr>
+            </a:pPr>
+            <a:r>
+              <a:t>Panduan Aksi Bisnis:</a:t>
+            </a:r>
+          </a:p>
+          <a:p>
+            <a:pPr lvl="1">
+              <a:spcAft>
+                <a:spcPts val="1200"/>
+              </a:spcAft>
+              <a:defRPr sz="2400">
+                <a:solidFill>
+                  <a:srgbClr val="403E3E"/>
+                </a:solidFill>
+                <a:latin typeface="Inter"/>
+              </a:defRPr>
+            </a:pPr>
+            <a:r>
+              <a:t>- Fokus Renovasi: Merekomendasikan pemilik rumah tua untuk meningkatkan kualitas desain (grade) daripada memperluas lahan fisik.</a:t>
+            </a:r>
+          </a:p>
+          <a:p>
+            <a:pPr lvl="1">
+              <a:spcAft>
+                <a:spcPts val="1200"/>
+              </a:spcAft>
+              <a:defRPr sz="2400">
+                <a:solidFill>
+                  <a:srgbClr val="403E3E"/>
+                </a:solidFill>
+                <a:latin typeface="Inter"/>
+              </a:defRPr>
+            </a:pPr>
+            <a:r>
+              <a:t>- Strategi Penetapan Harga: Menggunakan model untuk mendeteksi rumah dengan harga pasar di bawah taksiran SVR (properti undervalue) sebagai target investasi.</a:t>
+            </a:r>
+          </a:p>
+          <a:p>
+            <a:pPr lvl="1">
+              <a:spcAft>
+                <a:spcPts val="1200"/>
+              </a:spcAft>
+              <a:defRPr sz="2400">
+                <a:solidFill>
+                  <a:srgbClr val="403E3E"/>
+                </a:solidFill>
+                <a:latin typeface="Inter"/>
+              </a:defRPr>
+            </a:pPr>
+            <a:r>
+              <a:t>- Manajemen Risiko: Menghindari pembelian rumah dengan usia sangat tua di lokasi selatan yang terpencil akibat depresiasi nilai yang cepat.</a:t>
+            </a:r>
+          </a:p>
+        </p:txBody>
+      </p:sp>
+    </p:spTree>
+  </p:cSld>
+  <p:clrMapOvr>
+    <a:masterClrMapping/>
+  </p:clrMapOvr>
+</p:sld>
+</file>
+
+<file path=ppt/slides/slide7.xml><?xml version="1.0" encoding="utf-8"?>
+<p:sld xmlns:a="http://schemas.openxmlformats.org/drawingml/2006/main" xmlns:r="http://schemas.openxmlformats.org/officeDocument/2006/relationships" xmlns:p="http://schemas.openxmlformats.org/presentationml/2006/main">
+  <p:cSld>
+    <p:bg>
+      <p:bgPr>
+        <a:solidFill>
+          <a:srgbClr val="F6F5F3"/>
+        </a:solidFill>
+        <a:effectLst/>
+      </p:bgPr>
+    </p:bg>
+    <p:spTree>
+      <p:nvGrpSpPr>
+        <p:cNvPr id="1" name=""/>
+        <p:cNvGrpSpPr/>
+        <p:nvPr/>
+      </p:nvGrpSpPr>
+      <p:grpSpPr>
+        <a:xfrm>
+          <a:off x="0" y="0"/>
+          <a:ext cx="0" cy="0"/>
+          <a:chOff x="0" y="0"/>
+          <a:chExt cx="0" cy="0"/>
+        </a:xfrm>
+      </p:grpSpPr>
+      <p:grpSp>
+        <p:nvGrpSpPr>
+          <p:cNvPr id="2" name="Group 2"/>
+          <p:cNvGrpSpPr/>
+          <p:nvPr/>
+        </p:nvGrpSpPr>
+        <p:grpSpPr>
+          <a:xfrm rot="5400000">
+            <a:off x="12432431" y="4605338"/>
+            <a:ext cx="10730064" cy="1076325"/>
+            <a:chOff x="0" y="0"/>
+            <a:chExt cx="3845413" cy="385731"/>
+          </a:xfrm>
+        </p:grpSpPr>
+        <p:sp>
+          <p:nvSpPr>
+            <p:cNvPr id="3" name="Freeform 3"/>
+            <p:cNvSpPr/>
+            <p:nvPr/>
+          </p:nvSpPr>
+          <p:spPr>
+            <a:xfrm>
+              <a:off x="0" y="0"/>
+              <a:ext cx="3845413" cy="385731"/>
+            </a:xfrm>
+            <a:custGeom>
+              <a:avLst/>
+              <a:gdLst/>
+              <a:ahLst/>
+              <a:cxnLst/>
+              <a:rect l="l" t="t" r="r" b="b"/>
+              <a:pathLst>
+                <a:path w="3845413" h="385731">
+                  <a:moveTo>
+                    <a:pt x="0" y="0"/>
+                  </a:moveTo>
+                  <a:lnTo>
+                    <a:pt x="3845413" y="0"/>
+                  </a:lnTo>
+                  <a:lnTo>
+                    <a:pt x="3845413" y="385731"/>
+                  </a:lnTo>
+                  <a:lnTo>
+                    <a:pt x="0" y="385731"/>
+                  </a:lnTo>
+                  <a:close/>
+                </a:path>
+              </a:pathLst>
+            </a:custGeom>
+            <a:solidFill>
+              <a:srgbClr val="FDFDFA"/>
+            </a:solidFill>
+            <a:ln w="9525" cap="sq">
+              <a:solidFill>
+                <a:srgbClr val="403E3E"/>
+              </a:solidFill>
+              <a:prstDash val="solid"/>
+              <a:miter/>
+            </a:ln>
+          </p:spPr>
+        </p:sp>
+        <p:sp>
+          <p:nvSpPr>
+            <p:cNvPr id="4" name="TextBox 4"/>
+            <p:cNvSpPr txBox="1"/>
+            <p:nvPr/>
+          </p:nvSpPr>
+          <p:spPr>
+            <a:xfrm>
+              <a:off x="0" y="-47625"/>
+              <a:ext cx="3845413" cy="433356"/>
+            </a:xfrm>
+            <a:prstGeom prst="rect">
+              <a:avLst/>
+            </a:prstGeom>
+          </p:spPr>
+          <p:txBody>
+            <a:bodyPr lIns="50800" tIns="50800" rIns="50800" bIns="50800" rtlCol="0" anchor="ctr"/>
+            <a:lstStyle/>
+            <a:p>
+              <a:pPr algn="ctr">
+                <a:lnSpc>
+                  <a:spcPts val="1960"/>
+                </a:lnSpc>
+              </a:pPr>
+            </a:p>
+          </p:txBody>
+        </p:sp>
+      </p:grpSp>
+      <p:sp>
+        <p:nvSpPr>
+          <p:cNvPr id="5" name="TextBox 4"/>
+          <p:cNvSpPr txBox="1"/>
+          <p:nvPr/>
+        </p:nvSpPr>
+        <p:spPr>
+          <a:xfrm>
+            <a:off x="7696504" y="3771900"/>
+            <a:ext cx="7552944" cy="926287"/>
+          </a:xfrm>
+          <a:prstGeom prst="rect">
+            <a:avLst/>
+          </a:prstGeom>
+          <a:noFill/>
+        </p:spPr>
+        <p:txBody>
+          <a:bodyPr wrap="square">
+            <a:spAutoFit/>
+          </a:bodyPr>
+          <a:lstStyle/>
+          <a:p>
+            <a:r>
               <a:rPr sz="8500" b="1" i="0">
                 <a:solidFill>
                   <a:srgbClr val="403E3E"/>
@@ -5548,12 +5709,6 @@
               </a:rPr>
               <a:t>THANK YOU</a:t>
             </a:r>
-            <a:endParaRPr sz="8500" b="1" i="0">
-              <a:solidFill>
-                <a:srgbClr val="403E3E"/>
-              </a:solidFill>
-              <a:latin typeface="Inter Semi-Bold"/>
-            </a:endParaRPr>
           </a:p>
         </p:txBody>
       </p:sp>
